--- a/單單只為你.pptx
+++ b/單單只為你.pptx
@@ -8,14 +8,16 @@
     <p:sldId id="353" r:id="rId2"/>
     <p:sldId id="390" r:id="rId3"/>
     <p:sldId id="482" r:id="rId4"/>
-    <p:sldId id="483" r:id="rId5"/>
-    <p:sldId id="484" r:id="rId6"/>
-    <p:sldId id="485" r:id="rId7"/>
-    <p:sldId id="486" r:id="rId8"/>
-    <p:sldId id="487" r:id="rId9"/>
-    <p:sldId id="488" r:id="rId10"/>
-    <p:sldId id="489" r:id="rId11"/>
-    <p:sldId id="490" r:id="rId12"/>
+    <p:sldId id="491" r:id="rId5"/>
+    <p:sldId id="483" r:id="rId6"/>
+    <p:sldId id="484" r:id="rId7"/>
+    <p:sldId id="485" r:id="rId8"/>
+    <p:sldId id="486" r:id="rId9"/>
+    <p:sldId id="487" r:id="rId10"/>
+    <p:sldId id="488" r:id="rId11"/>
+    <p:sldId id="489" r:id="rId12"/>
+    <p:sldId id="492" r:id="rId13"/>
+    <p:sldId id="490" r:id="rId14"/>
   </p:sldIdLst>
   <p:sldSz cx="12192000" cy="6858000"/>
   <p:notesSz cx="6858000" cy="9144000"/>
@@ -114,6 +116,11 @@
       </a:defRPr>
     </a:lvl9pPr>
   </p:defaultTextStyle>
+  <p:extLst>
+    <p:ext uri="{EFAFB233-063F-42B5-8137-9DF3F51BA10A}">
+      <p15:sldGuideLst xmlns:p15="http://schemas.microsoft.com/office/powerpoint/2012/main"/>
+    </p:ext>
+  </p:extLst>
 </p:presentation>
 </file>
 
@@ -298,7 +305,7 @@
           <a:p>
             <a:fld id="{9CA12264-0728-4146-BEED-CCB297D5B3CD}" type="datetimeFigureOut">
               <a:rPr lang="en-US" smtClean="0"/>
-              <a:t>3/16/2024</a:t>
+              <a:t>9/14/2024</a:t>
             </a:fld>
             <a:endParaRPr lang="en-US"/>
           </a:p>
@@ -468,7 +475,7 @@
           <a:p>
             <a:fld id="{9CA12264-0728-4146-BEED-CCB297D5B3CD}" type="datetimeFigureOut">
               <a:rPr lang="en-US" smtClean="0"/>
-              <a:t>3/16/2024</a:t>
+              <a:t>9/14/2024</a:t>
             </a:fld>
             <a:endParaRPr lang="en-US"/>
           </a:p>
@@ -648,7 +655,7 @@
           <a:p>
             <a:fld id="{9CA12264-0728-4146-BEED-CCB297D5B3CD}" type="datetimeFigureOut">
               <a:rPr lang="en-US" smtClean="0"/>
-              <a:t>3/16/2024</a:t>
+              <a:t>9/14/2024</a:t>
             </a:fld>
             <a:endParaRPr lang="en-US"/>
           </a:p>
@@ -818,7 +825,7 @@
           <a:p>
             <a:fld id="{9CA12264-0728-4146-BEED-CCB297D5B3CD}" type="datetimeFigureOut">
               <a:rPr lang="en-US" smtClean="0"/>
-              <a:t>3/16/2024</a:t>
+              <a:t>9/14/2024</a:t>
             </a:fld>
             <a:endParaRPr lang="en-US"/>
           </a:p>
@@ -1064,7 +1071,7 @@
           <a:p>
             <a:fld id="{9CA12264-0728-4146-BEED-CCB297D5B3CD}" type="datetimeFigureOut">
               <a:rPr lang="en-US" smtClean="0"/>
-              <a:t>3/16/2024</a:t>
+              <a:t>9/14/2024</a:t>
             </a:fld>
             <a:endParaRPr lang="en-US"/>
           </a:p>
@@ -1352,7 +1359,7 @@
           <a:p>
             <a:fld id="{9CA12264-0728-4146-BEED-CCB297D5B3CD}" type="datetimeFigureOut">
               <a:rPr lang="en-US" smtClean="0"/>
-              <a:t>3/16/2024</a:t>
+              <a:t>9/14/2024</a:t>
             </a:fld>
             <a:endParaRPr lang="en-US"/>
           </a:p>
@@ -1774,7 +1781,7 @@
           <a:p>
             <a:fld id="{9CA12264-0728-4146-BEED-CCB297D5B3CD}" type="datetimeFigureOut">
               <a:rPr lang="en-US" smtClean="0"/>
-              <a:t>3/16/2024</a:t>
+              <a:t>9/14/2024</a:t>
             </a:fld>
             <a:endParaRPr lang="en-US"/>
           </a:p>
@@ -1892,7 +1899,7 @@
           <a:p>
             <a:fld id="{9CA12264-0728-4146-BEED-CCB297D5B3CD}" type="datetimeFigureOut">
               <a:rPr lang="en-US" smtClean="0"/>
-              <a:t>3/16/2024</a:t>
+              <a:t>9/14/2024</a:t>
             </a:fld>
             <a:endParaRPr lang="en-US"/>
           </a:p>
@@ -1987,7 +1994,7 @@
           <a:p>
             <a:fld id="{9CA12264-0728-4146-BEED-CCB297D5B3CD}" type="datetimeFigureOut">
               <a:rPr lang="en-US" smtClean="0"/>
-              <a:t>3/16/2024</a:t>
+              <a:t>9/14/2024</a:t>
             </a:fld>
             <a:endParaRPr lang="en-US"/>
           </a:p>
@@ -2264,7 +2271,7 @@
           <a:p>
             <a:fld id="{9CA12264-0728-4146-BEED-CCB297D5B3CD}" type="datetimeFigureOut">
               <a:rPr lang="en-US" smtClean="0"/>
-              <a:t>3/16/2024</a:t>
+              <a:t>9/14/2024</a:t>
             </a:fld>
             <a:endParaRPr lang="en-US"/>
           </a:p>
@@ -2521,7 +2528,7 @@
           <a:p>
             <a:fld id="{9CA12264-0728-4146-BEED-CCB297D5B3CD}" type="datetimeFigureOut">
               <a:rPr lang="en-US" smtClean="0"/>
-              <a:t>3/16/2024</a:t>
+              <a:t>9/14/2024</a:t>
             </a:fld>
             <a:endParaRPr lang="en-US"/>
           </a:p>
@@ -2737,7 +2744,7 @@
           <a:p>
             <a:fld id="{9CA12264-0728-4146-BEED-CCB297D5B3CD}" type="datetimeFigureOut">
               <a:rPr lang="en-US" smtClean="0"/>
-              <a:t>3/16/2024</a:t>
+              <a:t>9/14/2024</a:t>
             </a:fld>
             <a:endParaRPr lang="en-US"/>
           </a:p>
@@ -3226,7 +3233,7 @@
                 <a:latin typeface="微軟正黑體" pitchFamily="34" charset="-120"/>
                 <a:ea typeface="微軟正黑體" pitchFamily="34" charset="-120"/>
               </a:rPr>
-              <a:t>呼求耶和華的晝夜不停息</a:t>
+              <a:t>主  給我一個夢</a:t>
             </a:r>
             <a:endParaRPr lang="en-US" altLang="zh-TW" sz="6400" b="1" dirty="0">
               <a:solidFill>
@@ -3248,7 +3255,7 @@
                 <a:latin typeface="微軟正黑體" pitchFamily="34" charset="-120"/>
                 <a:ea typeface="微軟正黑體" pitchFamily="34" charset="-120"/>
               </a:rPr>
-              <a:t>主  給我一個夢 </a:t>
+              <a:t>禱告的聲音如馨香之祭 </a:t>
             </a:r>
             <a:endParaRPr lang="en-US" altLang="zh-TW" sz="6400" b="1" dirty="0">
               <a:solidFill>
@@ -3335,7 +3342,7 @@
     </p:spTree>
     <p:extLst>
       <p:ext uri="{BB962C8B-B14F-4D97-AF65-F5344CB8AC3E}">
-        <p14:creationId xmlns:p14="http://schemas.microsoft.com/office/powerpoint/2010/main" val="2697823786"/>
+        <p14:creationId xmlns:p14="http://schemas.microsoft.com/office/powerpoint/2010/main" val="2996068523"/>
       </p:ext>
     </p:extLst>
   </p:cSld>
@@ -3395,7 +3402,7 @@
                 <a:latin typeface="微軟正黑體" pitchFamily="34" charset="-120"/>
                 <a:ea typeface="微軟正黑體" pitchFamily="34" charset="-120"/>
               </a:rPr>
-              <a:t>執政掌權者高舉主的名</a:t>
+              <a:t>呼求耶和華的晝夜不停息</a:t>
             </a:r>
             <a:endParaRPr lang="en-US" altLang="zh-TW" sz="6400" b="1" dirty="0">
               <a:solidFill>
@@ -3405,6 +3412,293 @@
               <a:ea typeface="微軟正黑體" pitchFamily="34" charset="-120"/>
             </a:endParaRPr>
           </a:p>
+        </p:txBody>
+      </p:sp>
+      <p:sp>
+        <p:nvSpPr>
+          <p:cNvPr id="3" name="TextBox 2"/>
+          <p:cNvSpPr txBox="1"/>
+          <p:nvPr/>
+        </p:nvSpPr>
+        <p:spPr>
+          <a:xfrm>
+            <a:off x="0" y="5157192"/>
+            <a:ext cx="12192000" cy="666786"/>
+          </a:xfrm>
+          <a:prstGeom prst="rect">
+            <a:avLst/>
+          </a:prstGeom>
+          <a:noFill/>
+        </p:spPr>
+        <p:txBody>
+          <a:bodyPr wrap="square" rtlCol="0">
+            <a:spAutoFit/>
+          </a:bodyPr>
+          <a:lstStyle/>
+          <a:p>
+            <a:pPr algn="ctr"/>
+            <a:r>
+              <a:rPr lang="en-US" sz="3733" b="1" dirty="0">
+                <a:solidFill>
+                  <a:srgbClr val="000066"/>
+                </a:solidFill>
+                <a:latin typeface="Microsoft JhengHei" panose="020B0604030504040204" pitchFamily="34" charset="-120"/>
+                <a:ea typeface="Microsoft JhengHei" panose="020B0604030504040204" pitchFamily="34" charset="-120"/>
+              </a:rPr>
+              <a:t>( </a:t>
+            </a:r>
+            <a:r>
+              <a:rPr lang="zh-CN" altLang="en-US" sz="3733" b="1" dirty="0">
+                <a:solidFill>
+                  <a:srgbClr val="000066"/>
+                </a:solidFill>
+                <a:latin typeface="Microsoft JhengHei" panose="020B0604030504040204" pitchFamily="34" charset="-120"/>
+                <a:ea typeface="Microsoft JhengHei" panose="020B0604030504040204" pitchFamily="34" charset="-120"/>
+              </a:rPr>
+              <a:t>正歌 </a:t>
+            </a:r>
+            <a:r>
+              <a:rPr lang="en-US" altLang="zh-CN" sz="3733" b="1" dirty="0">
+                <a:solidFill>
+                  <a:srgbClr val="000066"/>
+                </a:solidFill>
+                <a:latin typeface="Microsoft JhengHei" panose="020B0604030504040204" pitchFamily="34" charset="-120"/>
+                <a:ea typeface="Microsoft JhengHei" panose="020B0604030504040204" pitchFamily="34" charset="-120"/>
+              </a:rPr>
+              <a:t>2</a:t>
+            </a:r>
+            <a:r>
+              <a:rPr lang="en-US" sz="3733" b="1" dirty="0">
+                <a:solidFill>
+                  <a:srgbClr val="000066"/>
+                </a:solidFill>
+                <a:latin typeface="Microsoft JhengHei" panose="020B0604030504040204" pitchFamily="34" charset="-120"/>
+                <a:ea typeface="Microsoft JhengHei" panose="020B0604030504040204" pitchFamily="34" charset="-120"/>
+              </a:rPr>
+              <a:t> )</a:t>
+            </a:r>
+            <a:endParaRPr lang="vi-VN" sz="3733" b="1" dirty="0">
+              <a:solidFill>
+                <a:srgbClr val="000066"/>
+              </a:solidFill>
+              <a:ea typeface="Microsoft JhengHei" panose="020B0604030504040204" pitchFamily="34" charset="-120"/>
+            </a:endParaRPr>
+          </a:p>
+        </p:txBody>
+      </p:sp>
+    </p:spTree>
+    <p:extLst>
+      <p:ext uri="{BB962C8B-B14F-4D97-AF65-F5344CB8AC3E}">
+        <p14:creationId xmlns:p14="http://schemas.microsoft.com/office/powerpoint/2010/main" val="2697823786"/>
+      </p:ext>
+    </p:extLst>
+  </p:cSld>
+  <p:clrMapOvr>
+    <a:masterClrMapping/>
+  </p:clrMapOvr>
+</p:sld>
+</file>
+
+<file path=ppt/slides/slide12.xml><?xml version="1.0" encoding="utf-8"?>
+<p:sld xmlns:a="http://schemas.openxmlformats.org/drawingml/2006/main" xmlns:r="http://schemas.openxmlformats.org/officeDocument/2006/relationships" xmlns:p="http://schemas.openxmlformats.org/presentationml/2006/main">
+  <p:cSld>
+    <p:spTree>
+      <p:nvGrpSpPr>
+        <p:cNvPr id="1" name=""/>
+        <p:cNvGrpSpPr/>
+        <p:nvPr/>
+      </p:nvGrpSpPr>
+      <p:grpSpPr>
+        <a:xfrm>
+          <a:off x="0" y="0"/>
+          <a:ext cx="0" cy="0"/>
+          <a:chOff x="0" y="0"/>
+          <a:chExt cx="0" cy="0"/>
+        </a:xfrm>
+      </p:grpSpPr>
+      <p:sp>
+        <p:nvSpPr>
+          <p:cNvPr id="5" name="內容版面配置區 4"/>
+          <p:cNvSpPr>
+            <a:spLocks noGrp="1"/>
+          </p:cNvSpPr>
+          <p:nvPr>
+            <p:ph idx="1"/>
+          </p:nvPr>
+        </p:nvSpPr>
+        <p:spPr>
+          <a:xfrm>
+            <a:off x="0" y="2084851"/>
+            <a:ext cx="12192000" cy="2404863"/>
+          </a:xfrm>
+        </p:spPr>
+        <p:txBody>
+          <a:bodyPr anchor="ctr">
+            <a:normAutofit/>
+          </a:bodyPr>
+          <a:lstStyle/>
+          <a:p>
+            <a:pPr algn="ctr">
+              <a:buNone/>
+            </a:pPr>
+            <a:r>
+              <a:rPr lang="zh-TW" altLang="en-US" sz="6400" b="1" dirty="0">
+                <a:solidFill>
+                  <a:srgbClr val="000066"/>
+                </a:solidFill>
+                <a:latin typeface="微軟正黑體" pitchFamily="34" charset="-120"/>
+                <a:ea typeface="微軟正黑體" pitchFamily="34" charset="-120"/>
+              </a:rPr>
+              <a:t>主  給我一個夢 </a:t>
+            </a:r>
+            <a:endParaRPr lang="en-US" altLang="zh-TW" sz="6400" b="1" dirty="0">
+              <a:solidFill>
+                <a:srgbClr val="000066"/>
+              </a:solidFill>
+              <a:latin typeface="微軟正黑體" pitchFamily="34" charset="-120"/>
+              <a:ea typeface="微軟正黑體" pitchFamily="34" charset="-120"/>
+            </a:endParaRPr>
+          </a:p>
+          <a:p>
+            <a:pPr algn="ctr">
+              <a:buNone/>
+            </a:pPr>
+            <a:r>
+              <a:rPr lang="zh-TW" altLang="en-US" sz="6400" b="1" dirty="0">
+                <a:solidFill>
+                  <a:srgbClr val="000066"/>
+                </a:solidFill>
+                <a:latin typeface="微軟正黑體" pitchFamily="34" charset="-120"/>
+                <a:ea typeface="微軟正黑體" pitchFamily="34" charset="-120"/>
+              </a:rPr>
+              <a:t>執政掌權者高舉主的名</a:t>
+            </a:r>
+          </a:p>
+        </p:txBody>
+      </p:sp>
+      <p:sp>
+        <p:nvSpPr>
+          <p:cNvPr id="3" name="TextBox 2"/>
+          <p:cNvSpPr txBox="1"/>
+          <p:nvPr/>
+        </p:nvSpPr>
+        <p:spPr>
+          <a:xfrm>
+            <a:off x="0" y="5157192"/>
+            <a:ext cx="12192000" cy="666786"/>
+          </a:xfrm>
+          <a:prstGeom prst="rect">
+            <a:avLst/>
+          </a:prstGeom>
+          <a:noFill/>
+        </p:spPr>
+        <p:txBody>
+          <a:bodyPr wrap="square" rtlCol="0">
+            <a:spAutoFit/>
+          </a:bodyPr>
+          <a:lstStyle/>
+          <a:p>
+            <a:pPr algn="ctr"/>
+            <a:r>
+              <a:rPr lang="en-US" sz="3733" b="1" dirty="0">
+                <a:solidFill>
+                  <a:srgbClr val="000066"/>
+                </a:solidFill>
+                <a:latin typeface="Microsoft JhengHei" panose="020B0604030504040204" pitchFamily="34" charset="-120"/>
+                <a:ea typeface="Microsoft JhengHei" panose="020B0604030504040204" pitchFamily="34" charset="-120"/>
+              </a:rPr>
+              <a:t>( </a:t>
+            </a:r>
+            <a:r>
+              <a:rPr lang="zh-CN" altLang="en-US" sz="3733" b="1" dirty="0">
+                <a:solidFill>
+                  <a:srgbClr val="000066"/>
+                </a:solidFill>
+                <a:latin typeface="Microsoft JhengHei" panose="020B0604030504040204" pitchFamily="34" charset="-120"/>
+                <a:ea typeface="Microsoft JhengHei" panose="020B0604030504040204" pitchFamily="34" charset="-120"/>
+              </a:rPr>
+              <a:t>正歌 </a:t>
+            </a:r>
+            <a:r>
+              <a:rPr lang="en-US" altLang="zh-CN" sz="3733" b="1" dirty="0">
+                <a:solidFill>
+                  <a:srgbClr val="000066"/>
+                </a:solidFill>
+                <a:latin typeface="Microsoft JhengHei" panose="020B0604030504040204" pitchFamily="34" charset="-120"/>
+                <a:ea typeface="Microsoft JhengHei" panose="020B0604030504040204" pitchFamily="34" charset="-120"/>
+              </a:rPr>
+              <a:t>2</a:t>
+            </a:r>
+            <a:r>
+              <a:rPr lang="en-US" sz="3733" b="1" dirty="0">
+                <a:solidFill>
+                  <a:srgbClr val="000066"/>
+                </a:solidFill>
+                <a:latin typeface="Microsoft JhengHei" panose="020B0604030504040204" pitchFamily="34" charset="-120"/>
+                <a:ea typeface="Microsoft JhengHei" panose="020B0604030504040204" pitchFamily="34" charset="-120"/>
+              </a:rPr>
+              <a:t> )</a:t>
+            </a:r>
+            <a:endParaRPr lang="vi-VN" sz="3733" b="1" dirty="0">
+              <a:solidFill>
+                <a:srgbClr val="000066"/>
+              </a:solidFill>
+              <a:ea typeface="Microsoft JhengHei" panose="020B0604030504040204" pitchFamily="34" charset="-120"/>
+            </a:endParaRPr>
+          </a:p>
+        </p:txBody>
+      </p:sp>
+    </p:spTree>
+    <p:extLst>
+      <p:ext uri="{BB962C8B-B14F-4D97-AF65-F5344CB8AC3E}">
+        <p14:creationId xmlns:p14="http://schemas.microsoft.com/office/powerpoint/2010/main" val="2496753903"/>
+      </p:ext>
+    </p:extLst>
+  </p:cSld>
+  <p:clrMapOvr>
+    <a:masterClrMapping/>
+  </p:clrMapOvr>
+</p:sld>
+</file>
+
+<file path=ppt/slides/slide13.xml><?xml version="1.0" encoding="utf-8"?>
+<p:sld xmlns:a="http://schemas.openxmlformats.org/drawingml/2006/main" xmlns:r="http://schemas.openxmlformats.org/officeDocument/2006/relationships" xmlns:p="http://schemas.openxmlformats.org/presentationml/2006/main">
+  <p:cSld>
+    <p:spTree>
+      <p:nvGrpSpPr>
+        <p:cNvPr id="1" name=""/>
+        <p:cNvGrpSpPr/>
+        <p:nvPr/>
+      </p:nvGrpSpPr>
+      <p:grpSpPr>
+        <a:xfrm>
+          <a:off x="0" y="0"/>
+          <a:ext cx="0" cy="0"/>
+          <a:chOff x="0" y="0"/>
+          <a:chExt cx="0" cy="0"/>
+        </a:xfrm>
+      </p:grpSpPr>
+      <p:sp>
+        <p:nvSpPr>
+          <p:cNvPr id="5" name="內容版面配置區 4"/>
+          <p:cNvSpPr>
+            <a:spLocks noGrp="1"/>
+          </p:cNvSpPr>
+          <p:nvPr>
+            <p:ph idx="1"/>
+          </p:nvPr>
+        </p:nvSpPr>
+        <p:spPr>
+          <a:xfrm>
+            <a:off x="0" y="2084851"/>
+            <a:ext cx="12192000" cy="2404863"/>
+          </a:xfrm>
+        </p:spPr>
+        <p:txBody>
+          <a:bodyPr anchor="ctr">
+            <a:normAutofit/>
+          </a:bodyPr>
+          <a:lstStyle/>
           <a:p>
             <a:pPr algn="ctr">
               <a:buNone/>
@@ -3738,28 +4032,6 @@
               <a:ea typeface="微軟正黑體" pitchFamily="34" charset="-120"/>
             </a:endParaRPr>
           </a:p>
-          <a:p>
-            <a:pPr algn="ctr">
-              <a:buNone/>
-            </a:pPr>
-            <a:r>
-              <a:rPr lang="zh-TW" altLang="en-US" sz="6400" b="1" dirty="0">
-                <a:solidFill>
-                  <a:srgbClr val="000066"/>
-                </a:solidFill>
-                <a:latin typeface="微軟正黑體" pitchFamily="34" charset="-120"/>
-                <a:ea typeface="微軟正黑體" pitchFamily="34" charset="-120"/>
-              </a:rPr>
-              <a:t>主  給我一個夢 </a:t>
-            </a:r>
-            <a:endParaRPr lang="en-US" altLang="zh-TW" sz="6400" b="1" dirty="0">
-              <a:solidFill>
-                <a:srgbClr val="000066"/>
-              </a:solidFill>
-              <a:latin typeface="微軟正黑體" pitchFamily="34" charset="-120"/>
-              <a:ea typeface="微軟正黑體" pitchFamily="34" charset="-120"/>
-            </a:endParaRPr>
-          </a:p>
         </p:txBody>
       </p:sp>
       <p:sp>
@@ -3897,7 +4169,7 @@
                 <a:latin typeface="微軟正黑體" pitchFamily="34" charset="-120"/>
                 <a:ea typeface="微軟正黑體" pitchFamily="34" charset="-120"/>
               </a:rPr>
-              <a:t>年輕的靈魂活著只為祢</a:t>
+              <a:t>主  給我一個夢</a:t>
             </a:r>
             <a:endParaRPr lang="en-US" altLang="zh-TW" sz="6400" b="1" dirty="0">
               <a:solidFill>
@@ -3919,7 +4191,7 @@
                 <a:latin typeface="微軟正黑體" pitchFamily="34" charset="-120"/>
                 <a:ea typeface="微軟正黑體" pitchFamily="34" charset="-120"/>
               </a:rPr>
-              <a:t>每個夢想只是為祢</a:t>
+              <a:t>年輕的靈魂活著只為祢 </a:t>
             </a:r>
             <a:endParaRPr lang="en-US" altLang="zh-TW" sz="6400" b="1" dirty="0">
               <a:solidFill>
@@ -4006,7 +4278,7 @@
     </p:spTree>
     <p:extLst>
       <p:ext uri="{BB962C8B-B14F-4D97-AF65-F5344CB8AC3E}">
-        <p14:creationId xmlns:p14="http://schemas.microsoft.com/office/powerpoint/2010/main" val="3025082544"/>
+        <p14:creationId xmlns:p14="http://schemas.microsoft.com/office/powerpoint/2010/main" val="1230304995"/>
       </p:ext>
     </p:extLst>
   </p:cSld>
@@ -4066,29 +4338,7 @@
                 <a:latin typeface="微軟正黑體" pitchFamily="34" charset="-120"/>
                 <a:ea typeface="微軟正黑體" pitchFamily="34" charset="-120"/>
               </a:rPr>
-              <a:t>今天我選擇跟隨祢</a:t>
-            </a:r>
-            <a:endParaRPr lang="en-US" altLang="zh-TW" sz="6400" b="1" dirty="0">
-              <a:solidFill>
-                <a:srgbClr val="000066"/>
-              </a:solidFill>
-              <a:latin typeface="微軟正黑體" pitchFamily="34" charset="-120"/>
-              <a:ea typeface="微軟正黑體" pitchFamily="34" charset="-120"/>
-            </a:endParaRPr>
-          </a:p>
-          <a:p>
-            <a:pPr algn="ctr">
-              <a:buNone/>
-            </a:pPr>
-            <a:r>
-              <a:rPr lang="zh-TW" altLang="en-US" sz="6400" b="1" dirty="0">
-                <a:solidFill>
-                  <a:srgbClr val="000066"/>
-                </a:solidFill>
-                <a:latin typeface="微軟正黑體" pitchFamily="34" charset="-120"/>
-                <a:ea typeface="微軟正黑體" pitchFamily="34" charset="-120"/>
-              </a:rPr>
-              <a:t>潔淨我做聖潔的器皿 </a:t>
+              <a:t>每個夢想只是為祢</a:t>
             </a:r>
             <a:endParaRPr lang="en-US" altLang="zh-TW" sz="6400" b="1" dirty="0">
               <a:solidFill>
@@ -4141,7 +4391,17 @@
                 <a:latin typeface="Microsoft JhengHei" panose="020B0604030504040204" pitchFamily="34" charset="-120"/>
                 <a:ea typeface="Microsoft JhengHei" panose="020B0604030504040204" pitchFamily="34" charset="-120"/>
               </a:rPr>
-              <a:t>副歌</a:t>
+              <a:t>正歌 </a:t>
+            </a:r>
+            <a:r>
+              <a:rPr lang="en-US" altLang="zh-CN" sz="3733" b="1" dirty="0">
+                <a:solidFill>
+                  <a:srgbClr val="000066"/>
+                </a:solidFill>
+                <a:latin typeface="Microsoft JhengHei" panose="020B0604030504040204" pitchFamily="34" charset="-120"/>
+                <a:ea typeface="Microsoft JhengHei" panose="020B0604030504040204" pitchFamily="34" charset="-120"/>
+              </a:rPr>
+              <a:t>1</a:t>
             </a:r>
             <a:r>
               <a:rPr lang="en-US" sz="3733" b="1" dirty="0">
@@ -4165,7 +4425,7 @@
     </p:spTree>
     <p:extLst>
       <p:ext uri="{BB962C8B-B14F-4D97-AF65-F5344CB8AC3E}">
-        <p14:creationId xmlns:p14="http://schemas.microsoft.com/office/powerpoint/2010/main" val="928809200"/>
+        <p14:creationId xmlns:p14="http://schemas.microsoft.com/office/powerpoint/2010/main" val="3025082544"/>
       </p:ext>
     </p:extLst>
   </p:cSld>
@@ -4225,7 +4485,7 @@
                 <a:latin typeface="微軟正黑體" pitchFamily="34" charset="-120"/>
                 <a:ea typeface="微軟正黑體" pitchFamily="34" charset="-120"/>
               </a:rPr>
-              <a:t>面對困難  也不氣餒</a:t>
+              <a:t>今天我選擇跟隨祢</a:t>
             </a:r>
             <a:endParaRPr lang="en-US" altLang="zh-TW" sz="6400" b="1" dirty="0">
               <a:solidFill>
@@ -4247,7 +4507,7 @@
                 <a:latin typeface="微軟正黑體" pitchFamily="34" charset="-120"/>
                 <a:ea typeface="微軟正黑體" pitchFamily="34" charset="-120"/>
               </a:rPr>
-              <a:t>因賞賜是祢  收取也是祢 </a:t>
+              <a:t>潔淨我做聖潔的器皿 </a:t>
             </a:r>
             <a:endParaRPr lang="en-US" altLang="zh-TW" sz="6400" b="1" dirty="0">
               <a:solidFill>
@@ -4324,7 +4584,7 @@
     </p:spTree>
     <p:extLst>
       <p:ext uri="{BB962C8B-B14F-4D97-AF65-F5344CB8AC3E}">
-        <p14:creationId xmlns:p14="http://schemas.microsoft.com/office/powerpoint/2010/main" val="793612556"/>
+        <p14:creationId xmlns:p14="http://schemas.microsoft.com/office/powerpoint/2010/main" val="928809200"/>
       </p:ext>
     </p:extLst>
   </p:cSld>
@@ -4384,7 +4644,7 @@
                 <a:latin typeface="微軟正黑體" pitchFamily="34" charset="-120"/>
                 <a:ea typeface="微軟正黑體" pitchFamily="34" charset="-120"/>
               </a:rPr>
-              <a:t>今天我選擇跟隨祢</a:t>
+              <a:t>面對困難  也不氣餒</a:t>
             </a:r>
             <a:endParaRPr lang="en-US" altLang="zh-TW" sz="6400" b="1" dirty="0">
               <a:solidFill>
@@ -4406,7 +4666,7 @@
                 <a:latin typeface="微軟正黑體" pitchFamily="34" charset="-120"/>
                 <a:ea typeface="微軟正黑體" pitchFamily="34" charset="-120"/>
               </a:rPr>
-              <a:t>只願祢榮耀充滿這地</a:t>
+              <a:t>因賞賜是祢  收取也是祢 </a:t>
             </a:r>
             <a:endParaRPr lang="en-US" altLang="zh-TW" sz="6400" b="1" dirty="0">
               <a:solidFill>
@@ -4483,7 +4743,7 @@
     </p:spTree>
     <p:extLst>
       <p:ext uri="{BB962C8B-B14F-4D97-AF65-F5344CB8AC3E}">
-        <p14:creationId xmlns:p14="http://schemas.microsoft.com/office/powerpoint/2010/main" val="2976668660"/>
+        <p14:creationId xmlns:p14="http://schemas.microsoft.com/office/powerpoint/2010/main" val="793612556"/>
       </p:ext>
     </p:extLst>
   </p:cSld>
@@ -4543,7 +4803,7 @@
                 <a:latin typeface="微軟正黑體" pitchFamily="34" charset="-120"/>
                 <a:ea typeface="微軟正黑體" pitchFamily="34" charset="-120"/>
               </a:rPr>
-              <a:t>祢行大事  不可測度</a:t>
+              <a:t>今天我選擇跟隨祢</a:t>
             </a:r>
             <a:endParaRPr lang="en-US" altLang="zh-TW" sz="6400" b="1" dirty="0">
               <a:solidFill>
@@ -4565,7 +4825,7 @@
                 <a:latin typeface="微軟正黑體" pitchFamily="34" charset="-120"/>
                 <a:ea typeface="微軟正黑體" pitchFamily="34" charset="-120"/>
               </a:rPr>
-              <a:t>每個夢想單單只為祢</a:t>
+              <a:t>只願祢榮耀充滿這地</a:t>
             </a:r>
             <a:endParaRPr lang="en-US" altLang="zh-TW" sz="6400" b="1" dirty="0">
               <a:solidFill>
@@ -4642,7 +4902,7 @@
     </p:spTree>
     <p:extLst>
       <p:ext uri="{BB962C8B-B14F-4D97-AF65-F5344CB8AC3E}">
-        <p14:creationId xmlns:p14="http://schemas.microsoft.com/office/powerpoint/2010/main" val="3587042105"/>
+        <p14:creationId xmlns:p14="http://schemas.microsoft.com/office/powerpoint/2010/main" val="2976668660"/>
       </p:ext>
     </p:extLst>
   </p:cSld>
@@ -4702,7 +4962,7 @@
                 <a:latin typeface="微軟正黑體" pitchFamily="34" charset="-120"/>
                 <a:ea typeface="微軟正黑體" pitchFamily="34" charset="-120"/>
               </a:rPr>
-              <a:t>主  給我一個夢</a:t>
+              <a:t>祢行大事  不可測度</a:t>
             </a:r>
             <a:endParaRPr lang="en-US" altLang="zh-TW" sz="6400" b="1" dirty="0">
               <a:solidFill>
@@ -4724,7 +4984,7 @@
                 <a:latin typeface="微軟正黑體" pitchFamily="34" charset="-120"/>
                 <a:ea typeface="微軟正黑體" pitchFamily="34" charset="-120"/>
               </a:rPr>
-              <a:t>禱告的聲音如馨香之祭 </a:t>
+              <a:t>每個夢想單單只為祢</a:t>
             </a:r>
             <a:endParaRPr lang="en-US" altLang="zh-TW" sz="6400" b="1" dirty="0">
               <a:solidFill>
@@ -4777,17 +5037,7 @@
                 <a:latin typeface="Microsoft JhengHei" panose="020B0604030504040204" pitchFamily="34" charset="-120"/>
                 <a:ea typeface="Microsoft JhengHei" panose="020B0604030504040204" pitchFamily="34" charset="-120"/>
               </a:rPr>
-              <a:t>正歌 </a:t>
-            </a:r>
-            <a:r>
-              <a:rPr lang="en-US" altLang="zh-CN" sz="3733" b="1" dirty="0">
-                <a:solidFill>
-                  <a:srgbClr val="000066"/>
-                </a:solidFill>
-                <a:latin typeface="Microsoft JhengHei" panose="020B0604030504040204" pitchFamily="34" charset="-120"/>
-                <a:ea typeface="Microsoft JhengHei" panose="020B0604030504040204" pitchFamily="34" charset="-120"/>
-              </a:rPr>
-              <a:t>2</a:t>
+              <a:t>副歌</a:t>
             </a:r>
             <a:r>
               <a:rPr lang="en-US" sz="3733" b="1" dirty="0">
@@ -4811,7 +5061,7 @@
     </p:spTree>
     <p:extLst>
       <p:ext uri="{BB962C8B-B14F-4D97-AF65-F5344CB8AC3E}">
-        <p14:creationId xmlns:p14="http://schemas.microsoft.com/office/powerpoint/2010/main" val="2996068523"/>
+        <p14:creationId xmlns:p14="http://schemas.microsoft.com/office/powerpoint/2010/main" val="3587042105"/>
       </p:ext>
     </p:extLst>
   </p:cSld>
